--- a/Seasonal_Agriculture_Performance_Analysis_PPT (1).pptx
+++ b/Seasonal_Agriculture_Performance_Analysis_PPT (1).pptx
@@ -167,7 +167,7 @@
 <file path=ppt/revisionInfo.xml><?xml version="1.0" encoding="utf-8"?>
 <p1510:revInfo xmlns:a="http://schemas.openxmlformats.org/drawingml/2006/main" xmlns:r="http://schemas.openxmlformats.org/officeDocument/2006/relationships" xmlns:p1510="http://schemas.microsoft.com/office/powerpoint/2015/10/main">
   <p1510:revLst>
-    <p1510:client id="{84962830-3D34-42E3-9A9E-723129F62480}" v="23" dt="2026-09-09T15:36:30.924"/>
+    <p1510:client id="{84962830-3D34-42E3-9A9E-723129F62480}" v="25" dt="2026-09-09T16:24:31.839"/>
   </p1510:revLst>
 </p1510:revInfo>
 </file>
@@ -177,7 +177,7 @@
   <pc:docChgLst>
     <pc:chgData name="Anirudha Prabhu" userId="b65f1b90c0ca0b2f" providerId="LiveId" clId="{C5723458-ED72-4ABB-B50C-5289D3EB44D0}"/>
     <pc:docChg chg="custSel modSld">
-      <pc:chgData name="Anirudha Prabhu" userId="b65f1b90c0ca0b2f" providerId="LiveId" clId="{C5723458-ED72-4ABB-B50C-5289D3EB44D0}" dt="2026-09-09T16:06:33.601" v="63" actId="1076"/>
+      <pc:chgData name="Anirudha Prabhu" userId="b65f1b90c0ca0b2f" providerId="LiveId" clId="{C5723458-ED72-4ABB-B50C-5289D3EB44D0}" dt="2026-09-09T16:24:31.839" v="143" actId="20577"/>
       <pc:docMkLst>
         <pc:docMk/>
       </pc:docMkLst>
@@ -211,6 +211,21 @@
           </ac:spMkLst>
         </pc:spChg>
       </pc:sldChg>
+      <pc:sldChg chg="modSp">
+        <pc:chgData name="Anirudha Prabhu" userId="b65f1b90c0ca0b2f" providerId="LiveId" clId="{C5723458-ED72-4ABB-B50C-5289D3EB44D0}" dt="2026-09-09T16:24:31.839" v="143" actId="20577"/>
+        <pc:sldMkLst>
+          <pc:docMk/>
+          <pc:sldMk cId="3098548442" sldId="327"/>
+        </pc:sldMkLst>
+        <pc:spChg chg="mod">
+          <ac:chgData name="Anirudha Prabhu" userId="b65f1b90c0ca0b2f" providerId="LiveId" clId="{C5723458-ED72-4ABB-B50C-5289D3EB44D0}" dt="2026-09-09T16:24:31.839" v="143" actId="20577"/>
+          <ac:spMkLst>
+            <pc:docMk/>
+            <pc:sldMk cId="3098548442" sldId="327"/>
+            <ac:spMk id="2" creationId="{E46E4DD1-270B-4C80-AFF0-EB26F132AF36}"/>
+          </ac:spMkLst>
+        </pc:spChg>
+      </pc:sldChg>
       <pc:sldChg chg="modSp mod">
         <pc:chgData name="Anirudha Prabhu" userId="b65f1b90c0ca0b2f" providerId="LiveId" clId="{C5723458-ED72-4ABB-B50C-5289D3EB44D0}" dt="2026-09-09T16:06:33.601" v="63" actId="1076"/>
         <pc:sldMkLst>
@@ -239,6 +254,21 @@
             <pc:docMk/>
             <pc:sldMk cId="1604013440" sldId="338"/>
             <ac:spMk id="4" creationId="{92056599-CDAA-4367-BEF8-31D6E32518C8}"/>
+          </ac:spMkLst>
+        </pc:spChg>
+      </pc:sldChg>
+      <pc:sldChg chg="modSp mod">
+        <pc:chgData name="Anirudha Prabhu" userId="b65f1b90c0ca0b2f" providerId="LiveId" clId="{C5723458-ED72-4ABB-B50C-5289D3EB44D0}" dt="2026-09-09T16:24:16.698" v="142" actId="20577"/>
+        <pc:sldMkLst>
+          <pc:docMk/>
+          <pc:sldMk cId="3863610428" sldId="342"/>
+        </pc:sldMkLst>
+        <pc:spChg chg="mod">
+          <ac:chgData name="Anirudha Prabhu" userId="b65f1b90c0ca0b2f" providerId="LiveId" clId="{C5723458-ED72-4ABB-B50C-5289D3EB44D0}" dt="2026-09-09T16:24:16.698" v="142" actId="20577"/>
+          <ac:spMkLst>
+            <pc:docMk/>
+            <pc:sldMk cId="3863610428" sldId="342"/>
+            <ac:spMk id="3" creationId="{5F0B37E4-66B1-8633-7266-68B321742757}"/>
           </ac:spMkLst>
         </pc:spChg>
       </pc:sldChg>
@@ -18476,7 +18506,7 @@
           <a:p>
             <a:r>
               <a:rPr lang="en-US" dirty="0"/>
-              <a:t>https://github.com/&lt;your-github-username&gt;/Seasonal-Agriculture-Performance-Analysis</a:t>
+              <a:t>https: https://github.com/Shamika2231/Seasonal-Agriculture-Performance-Analysis</a:t>
             </a:r>
           </a:p>
         </p:txBody>
@@ -21994,10 +22024,6 @@
                 <a:spcPct val="100000"/>
               </a:lnSpc>
             </a:pPr>
-            <a:r>
-              <a:rPr lang="en-IN" sz="2800" dirty="0"/>
-              <a:t>(</a:t>
-            </a:r>
             <a:r>
               <a:rPr lang="en-US" sz="2800" dirty="0"/>
               <a:t>Agricultural activities are influenced by seasonal variations in environmental conditions, farming practices, resource availability and market conditions. As a result, agricultural performance may differ from one season to another. However, raw agricultural data does not clearly explain how agricultural performance changes across seasons or what patterns can be observed in different seasonal conditions. The problem is to analyze the given agricultural dataset and investigate seasonal differences in agricultural performance by identifying meaningful patterns, trends, relationships and variations within the available data.</a:t>
@@ -28840,15 +28866,6 @@
 </file>
 
 <file path=customXml/item1.xml><?xml version="1.0" encoding="utf-8"?>
-<p:properties xmlns:p="http://schemas.microsoft.com/office/2006/metadata/properties" xmlns:xsi="http://www.w3.org/2001/XMLSchema-instance" xmlns:pc="http://schemas.microsoft.com/office/infopath/2007/PartnerControls">
-  <documentManagement>
-    <Status xmlns="71af3243-3dd4-4a8d-8c0d-dd76da1f02a5">Not started</Status>
-    <MediaServiceKeyPoints xmlns="71af3243-3dd4-4a8d-8c0d-dd76da1f02a5" xsi:nil="true"/>
-  </documentManagement>
-</p:properties>
-</file>
-
-<file path=customXml/item2.xml><?xml version="1.0" encoding="utf-8"?>
 <ct:contentTypeSchema xmlns:ct="http://schemas.microsoft.com/office/2006/metadata/contentType" xmlns:ma="http://schemas.microsoft.com/office/2006/metadata/properties/metaAttributes" ct:_="" ma:_="" ma:contentTypeName="Document" ma:contentTypeID="0x01010079F111ED35F8CC479449609E8A0923A6" ma:contentTypeVersion="12" ma:contentTypeDescription="Create a new document." ma:contentTypeScope="" ma:versionID="426e97fa315356fffbdcd9876fe988c2">
   <xsd:schema xmlns:xsd="http://www.w3.org/2001/XMLSchema" xmlns:xs="http://www.w3.org/2001/XMLSchema" xmlns:p="http://schemas.microsoft.com/office/2006/metadata/properties" xmlns:ns2="71af3243-3dd4-4a8d-8c0d-dd76da1f02a5" xmlns:ns3="16c05727-aa75-4e4a-9b5f-8a80a1165891" targetNamespace="http://schemas.microsoft.com/office/2006/metadata/properties" ma:root="true" ma:fieldsID="14b8f0def80e6d70ce3def20c90759ae" ns2:_="" ns3:_="">
     <xsd:import namespace="71af3243-3dd4-4a8d-8c0d-dd76da1f02a5"/>
@@ -29069,6 +29086,15 @@
 </ct:contentTypeSchema>
 </file>
 
+<file path=customXml/item2.xml><?xml version="1.0" encoding="utf-8"?>
+<p:properties xmlns:p="http://schemas.microsoft.com/office/2006/metadata/properties" xmlns:xsi="http://www.w3.org/2001/XMLSchema-instance" xmlns:pc="http://schemas.microsoft.com/office/infopath/2007/PartnerControls">
+  <documentManagement>
+    <Status xmlns="71af3243-3dd4-4a8d-8c0d-dd76da1f02a5">Not started</Status>
+    <MediaServiceKeyPoints xmlns="71af3243-3dd4-4a8d-8c0d-dd76da1f02a5" xsi:nil="true"/>
+  </documentManagement>
+</p:properties>
+</file>
+
 <file path=customXml/item3.xml><?xml version="1.0" encoding="utf-8"?>
 <?mso-contentType ?>
 <FormTemplates xmlns="http://schemas.microsoft.com/sharepoint/v3/contenttype/forms">
@@ -29079,16 +29105,6 @@
 </file>
 
 <file path=customXml/itemProps1.xml><?xml version="1.0" encoding="utf-8"?>
-<ds:datastoreItem xmlns:ds="http://schemas.openxmlformats.org/officeDocument/2006/customXml" ds:itemID="{4DEA9014-ED64-4558-B1E1-D03F0EE32BEB}">
-  <ds:schemaRefs>
-    <ds:schemaRef ds:uri="http://schemas.microsoft.com/office/2006/metadata/properties"/>
-    <ds:schemaRef ds:uri="http://schemas.microsoft.com/office/infopath/2007/PartnerControls"/>
-    <ds:schemaRef ds:uri="71af3243-3dd4-4a8d-8c0d-dd76da1f02a5"/>
-  </ds:schemaRefs>
-</ds:datastoreItem>
-</file>
-
-<file path=customXml/itemProps2.xml><?xml version="1.0" encoding="utf-8"?>
 <ds:datastoreItem xmlns:ds="http://schemas.openxmlformats.org/officeDocument/2006/customXml" ds:itemID="{B19EB750-A6DA-4BE8-B87B-FC499FE73360}">
   <ds:schemaRefs>
     <ds:schemaRef ds:uri="http://schemas.microsoft.com/office/2006/metadata/contentType"/>
@@ -29107,6 +29123,16 @@
 </ds:datastoreItem>
 </file>
 
+<file path=customXml/itemProps2.xml><?xml version="1.0" encoding="utf-8"?>
+<ds:datastoreItem xmlns:ds="http://schemas.openxmlformats.org/officeDocument/2006/customXml" ds:itemID="{4DEA9014-ED64-4558-B1E1-D03F0EE32BEB}">
+  <ds:schemaRefs>
+    <ds:schemaRef ds:uri="http://schemas.microsoft.com/office/2006/metadata/properties"/>
+    <ds:schemaRef ds:uri="http://schemas.microsoft.com/office/infopath/2007/PartnerControls"/>
+    <ds:schemaRef ds:uri="71af3243-3dd4-4a8d-8c0d-dd76da1f02a5"/>
+  </ds:schemaRefs>
+</ds:datastoreItem>
+</file>
+
 <file path=customXml/itemProps3.xml><?xml version="1.0" encoding="utf-8"?>
 <ds:datastoreItem xmlns:ds="http://schemas.openxmlformats.org/officeDocument/2006/customXml" ds:itemID="{05D99ABA-76CE-4A8E-B5F0-C051B96628DE}">
   <ds:schemaRefs>
